--- a/deck/AI_Consumption_Mosaic.pptx
+++ b/deck/AI_Consumption_Mosaic.pptx
@@ -506,7 +506,7 @@
 team. Tall band, big application. The colour is who we paid.
   $79,448 over 50 days, 1,290,499 calls,
   about $48,331 a month at this rate.
-THE FOUR COLUMNS
+THE COLUMNS
   insait        $20,864   26.3% of the bill
   ai-factory    $14,443   18.2% of the bill
   solugen       $11,852   14.9% of the bill
@@ -539,8 +539,9 @@
 area is money that is not a rounding choice, it is a false statement. The
 figure is in the footnote.
 IF ASKED WHETHER IT RECONCILES: the bands add to their column and the
-columns add to the bill, and the build fails if they stop doing so. The
-workbook's own two tables differ by 1.5% on dollars and agree exactly on calls.
+columns add to the bill, and the build fails if they stop doing so.
+The workbook's own two tables differ by 1.5% on dollars and agree
+exactly on calls.
 THE ASK: put an application tag on the Bedrock calls. Gateway
 configuration, not a project. Then the right-hand column disappears into
 the teams where it belongs, and this becomes a chargeback.</a:t>
